--- a/releases/v4.16.0/CSCM-Tool_v4.16.0_Design-Showcase-Management.pptx
+++ b/releases/v4.16.0/CSCM-Tool_v4.16.0_Design-Showcase-Management.pptx
@@ -4757,7 +4757,7 @@
                 </a:solidFill>
                 <a:latin typeface="Calibri"/>
               </a:rPr>
-              <a:t>v4.13.0</a:t>
+              <a:t>v4.13.1 / v4.13.2</a:t>
             </a:r>
           </a:p>
         </p:txBody>
@@ -4796,7 +4796,7 @@
                 </a:solidFill>
                 <a:latin typeface="Calibri"/>
               </a:rPr>
-              <a:t>Bulk workflow for the migration — I-70 with I-61 and I-62</a:t>
+              <a:t>Select-all on every list with tick boxes</a:t>
             </a:r>
           </a:p>
         </p:txBody>
@@ -4835,7 +4835,7 @@
                 </a:solidFill>
                 <a:latin typeface="Calibri"/>
               </a:rPr>
-              <a:t>FR-180</a:t>
+              <a:t>FR-181, FR-182</a:t>
             </a:r>
           </a:p>
         </p:txBody>
@@ -4922,7 +4922,7 @@
                 </a:solidFill>
                 <a:latin typeface="Calibri"/>
               </a:rPr>
-              <a:t>v4.13.1 / v4.13.2</a:t>
+              <a:t>v4.14.0</a:t>
             </a:r>
           </a:p>
         </p:txBody>
@@ -4961,7 +4961,7 @@
                 </a:solidFill>
                 <a:latin typeface="Calibri"/>
               </a:rPr>
-              <a:t>Select-all on every list with tick boxes</a:t>
+              <a:t>Dark mode</a:t>
             </a:r>
           </a:p>
         </p:txBody>
@@ -5000,7 +5000,7 @@
                 </a:solidFill>
                 <a:latin typeface="Calibri"/>
               </a:rPr>
-              <a:t>FR-181, FR-182</a:t>
+              <a:t>FR-183</a:t>
             </a:r>
           </a:p>
         </p:txBody>
@@ -5087,7 +5087,7 @@
                 </a:solidFill>
                 <a:latin typeface="Calibri"/>
               </a:rPr>
-              <a:t>v4.14.0</a:t>
+              <a:t>v4.14.1</a:t>
             </a:r>
           </a:p>
         </p:txBody>
@@ -5126,7 +5126,7 @@
                 </a:solidFill>
                 <a:latin typeface="Calibri"/>
               </a:rPr>
-              <a:t>Dark mode</a:t>
+              <a:t>Visible version</a:t>
             </a:r>
           </a:p>
         </p:txBody>
@@ -5165,7 +5165,7 @@
                 </a:solidFill>
                 <a:latin typeface="Calibri"/>
               </a:rPr>
-              <a:t>FR-183</a:t>
+              <a:t>FR-184</a:t>
             </a:r>
           </a:p>
         </p:txBody>
@@ -5252,7 +5252,7 @@
                 </a:solidFill>
                 <a:latin typeface="Calibri"/>
               </a:rPr>
-              <a:t>v4.14.1</a:t>
+              <a:t>v4.15.0</a:t>
             </a:r>
           </a:p>
         </p:txBody>
@@ -5291,7 +5291,7 @@
                 </a:solidFill>
                 <a:latin typeface="Calibri"/>
               </a:rPr>
-              <a:t>Visible version</a:t>
+              <a:t>Release documents as PDF</a:t>
             </a:r>
           </a:p>
         </p:txBody>
@@ -5330,7 +5330,7 @@
                 </a:solidFill>
                 <a:latin typeface="Calibri"/>
               </a:rPr>
-              <a:t>FR-184</a:t>
+              <a:t>FR-185</a:t>
             </a:r>
           </a:p>
         </p:txBody>
@@ -5417,7 +5417,7 @@
                 </a:solidFill>
                 <a:latin typeface="Calibri"/>
               </a:rPr>
-              <a:t>v4.15.0</a:t>
+              <a:t>v4.16.0</a:t>
             </a:r>
           </a:p>
         </p:txBody>
@@ -5456,7 +5456,7 @@
                 </a:solidFill>
                 <a:latin typeface="Calibri"/>
               </a:rPr>
-              <a:t>Release documents as PDF</a:t>
+              <a:t>Design showcase decks</a:t>
             </a:r>
           </a:p>
         </p:txBody>
@@ -5495,7 +5495,7 @@
                 </a:solidFill>
                 <a:latin typeface="Calibri"/>
               </a:rPr>
-              <a:t>FR-185</a:t>
+              <a:t>FR-186, FR-187</a:t>
             </a:r>
           </a:p>
         </p:txBody>
@@ -5621,7 +5621,7 @@
                 </a:solidFill>
                 <a:latin typeface="Calibri"/>
               </a:rPr>
-              <a:t>Design showcase decks</a:t>
+              <a:t>Hand-over to the team repository</a:t>
             </a:r>
           </a:p>
         </p:txBody>
@@ -5660,7 +5660,7 @@
                 </a:solidFill>
                 <a:latin typeface="Calibri"/>
               </a:rPr>
-              <a:t>FR-186, FR-187</a:t>
+              <a:t>FR-188</a:t>
             </a:r>
           </a:p>
         </p:txBody>
@@ -8472,7 +8472,7 @@
                 </a:solidFill>
                 <a:latin typeface="Calibri"/>
               </a:rPr>
-              <a:t>1,019</a:t>
+              <a:t>1,025</a:t>
             </a:r>
           </a:p>
         </p:txBody>
@@ -8724,7 +8724,7 @@
                 </a:solidFill>
                 <a:latin typeface="Calibri"/>
               </a:rPr>
-              <a:t>215</a:t>
+              <a:t>216</a:t>
             </a:r>
           </a:p>
         </p:txBody>
